--- a/classes/parte-8-capstones/229-capstone-1-problema-tabular-end-to-end-eda-modelo-api-dashboard/clase-229-capstone-1-problema-tabular-end-to-end-eda-modelo-api-dashboard-presentacion.pptx
+++ b/classes/parte-8-capstones/229-capstone-1-problema-tabular-end-to-end-eda-modelo-api-dashboard/clase-229-capstone-1-problema-tabular-end-to-end-eda-modelo-api-dashboard-presentacion.pptx
@@ -3272,7 +3272,7 @@
                 </a:solidFill>
                 <a:latin typeface="Segoe UI"/>
               </a:rPr>
-              <a:t>Parte: 8 — Capstones · Fuente: integrador de Partes 0-7 + Huyen, C. Designing Machine Learning Systems (O'Reilly, 2022) caps. 4-7 + Géron, A. Hands-On ML, 3ª ed. caps. 2-3.  Duración estimada: 180 min.</a:t>
+              <a:t>Parte: 8 — Capstones · Fuente: integrador de Partes 0-7 + Huyen, C. Designing Machine Learning Systems (O'Reilly, 2022) caps. 4-7 + Géron, A. Hands-On ML, 3ª ed. caps. 2-3.  Duración estimada: 180 min. · Nivel: Avanzado</a:t>
             </a:r>
           </a:p>
         </p:txBody>
@@ -3581,7 +3581,7 @@
                 </a:solidFill>
                 <a:latin typeface="Segoe UI"/>
               </a:rPr>
-              <a:t>Parte: 8 — Capstones · Fuente: integrador de Partes 0-7 + Huyen, C. Designing Machine Learning Systems (O'Reilly, 2022) caps. 4-7 + Géron, A. Hands-On ML, 3ª ed. caps. 2-3.  Duración estimada: 180 min.</a:t>
+              <a:t>Parte: 8 — Capstones · Fuente: integrador de Partes 0-7 + Huyen, C. Designing Machine Learning Systems (O'Reilly, 2022) caps. 4-7 + Géron, A. Hands-On ML, 3ª ed. caps. 2-3.  Duración estimada: 180 min. · Nivel: Avanzado</a:t>
             </a:r>
           </a:p>
         </p:txBody>
